--- a/KnowledgeManagement_Graph.pptx
+++ b/KnowledgeManagement_Graph.pptx
@@ -12311,7 +12311,7 @@
         <p:spPr>
           <a:xfrm>
             <a:off x="533398" y="1016955"/>
-            <a:ext cx="11338304" cy="746759"/>
+            <a:ext cx="11658602" cy="746759"/>
           </a:xfrm>
         </p:spPr>
         <p:txBody>
@@ -12321,11 +12321,11 @@
           <a:lstStyle/>
           <a:p>
             <a:r>
-              <a:rPr lang="en-US" sz="3000" dirty="0"/>
+              <a:rPr lang="en-US" sz="2980" dirty="0"/>
               <a:t>Q</a:t>
             </a:r>
             <a:r>
-              <a:rPr lang="en-BR" sz="3000" dirty="0"/>
+              <a:rPr lang="en-BR" sz="2980" dirty="0"/>
               <a:t>uery 3 – courses with the most learning outcomes</a:t>
             </a:r>
           </a:p>
@@ -12525,7 +12525,7 @@
               <a:buNone/>
             </a:pPr>
             <a:r>
-              <a:rPr lang="en-US" sz="1600" dirty="0">
+              <a:rPr lang="en-US" sz="2000" dirty="0">
                 <a:solidFill>
                   <a:schemeClr val="tx2"/>
                 </a:solidFill>
@@ -12550,7 +12550,7 @@
         <p:spPr>
           <a:xfrm>
             <a:off x="6473126" y="3216464"/>
-            <a:ext cx="164592" cy="228600"/>
+            <a:ext cx="117010" cy="737332"/>
           </a:xfrm>
           <a:prstGeom prst="rect">
             <a:avLst/>
@@ -12595,7 +12595,7 @@
         </p:nvSpPr>
         <p:spPr>
           <a:xfrm>
-            <a:off x="6765734" y="3216464"/>
+            <a:off x="6783091" y="3543108"/>
             <a:ext cx="4754880" cy="320040"/>
           </a:xfrm>
           <a:prstGeom prst="rect">
@@ -12606,7 +12606,7 @@
         </p:spPr>
         <p:txBody>
           <a:bodyPr wrap="square" lIns="254" tIns="254" rIns="254" bIns="254" rtlCol="0" anchor="ctr">
-            <a:normAutofit/>
+            <a:noAutofit/>
           </a:bodyPr>
           <a:lstStyle/>
           <a:p>
@@ -12614,7 +12614,7 @@
               <a:buNone/>
             </a:pPr>
             <a:r>
-              <a:rPr lang="en-US" sz="1600" dirty="0">
+              <a:rPr lang="en-US" sz="2000" dirty="0">
                 <a:solidFill>
                   <a:schemeClr val="tx2"/>
                 </a:solidFill>
@@ -12638,8 +12638,8 @@
         </p:nvSpPr>
         <p:spPr>
           <a:xfrm>
-            <a:off x="6473126" y="3653527"/>
-            <a:ext cx="164592" cy="228600"/>
+            <a:off x="6490483" y="4080704"/>
+            <a:ext cx="154983" cy="603503"/>
           </a:xfrm>
           <a:prstGeom prst="rect">
             <a:avLst/>
@@ -12684,7 +12684,7 @@
         </p:nvSpPr>
         <p:spPr>
           <a:xfrm>
-            <a:off x="6765734" y="3653527"/>
+            <a:off x="6830386" y="4281232"/>
             <a:ext cx="4754880" cy="320040"/>
           </a:xfrm>
           <a:prstGeom prst="rect">
@@ -12695,7 +12695,7 @@
         </p:spPr>
         <p:txBody>
           <a:bodyPr wrap="square" lIns="254" tIns="254" rIns="254" bIns="254" rtlCol="0" anchor="ctr">
-            <a:normAutofit/>
+            <a:noAutofit/>
           </a:bodyPr>
           <a:lstStyle/>
           <a:p>
@@ -12703,7 +12703,7 @@
               <a:buNone/>
             </a:pPr>
             <a:r>
-              <a:rPr lang="en-US" sz="1600" dirty="0">
+              <a:rPr lang="en-US" sz="2000" dirty="0">
                 <a:solidFill>
                   <a:schemeClr val="tx2"/>
                 </a:solidFill>
@@ -12727,7 +12727,7 @@
         </p:nvSpPr>
         <p:spPr>
           <a:xfrm>
-            <a:off x="6473126" y="4179602"/>
+            <a:off x="6590136" y="4951762"/>
             <a:ext cx="4663440" cy="603504"/>
           </a:xfrm>
           <a:prstGeom prst="rect">
@@ -12956,7 +12956,7 @@
         <p:spPr>
           <a:xfrm>
             <a:off x="7575315" y="3135660"/>
-            <a:ext cx="3794760" cy="1671200"/>
+            <a:ext cx="4083284" cy="1671200"/>
           </a:xfrm>
           <a:prstGeom prst="rect">
             <a:avLst/>
@@ -13204,35 +13204,19 @@
           <a:p>
             <a:r>
               <a:rPr lang="en-BR" sz="2000" dirty="0"/>
-              <a:t>This was my first experience working with Neo4j and knowledge graphs. At first, understanding nodes, relationships, IDs, and Cypher queries was challenging, but building the graph step by step helped me understand how connected data works.</a:t>
+              <a:t>This was my first time working with Neo4j, so at the beginning I found the nodes, relationships and ID mappings quite confusing. After building the graph and fixing some mapping mistakes, I understood much better how the different CSV files were connected. </a:t>
             </a:r>
           </a:p>
           <a:p>
             <a:r>
               <a:rPr lang="en-BR" sz="2000" dirty="0"/>
-              <a:t>The final graph made the structure of the study programmes much easier to see. The analysis showed that </a:t>
-            </a:r>
-            <a:r>
-              <a:rPr lang="en-BR" sz="2000" b="1" dirty="0"/>
-              <a:t>Digital Humanities has more courses (50) than Business Informatics (29)</a:t>
-            </a:r>
+              <a:t>The results also made the dataset easier for me to understand. I could see that Digital Humanities has more courses, while Business Informatics has a higher average number of credits per course. I was also able to see which courses had the most topics and learning outcomes. </a:t>
+            </a:r>
+          </a:p>
+          <a:p>
             <a:r>
               <a:rPr lang="en-BR" sz="2000" dirty="0"/>
-              <a:t>, while </a:t>
-            </a:r>
-            <a:r>
-              <a:rPr lang="en-BR" sz="2000" b="1" dirty="0"/>
-              <a:t>Business Informatics has a higher average number of credits per course (6.31 compared with 4.56)</a:t>
-            </a:r>
-            <a:r>
-              <a:rPr lang="en-BR" sz="2000" dirty="0"/>
-              <a:t>. The graph also helped identify courses with many topics and learning outcomes.</a:t>
-            </a:r>
-          </a:p>
-          <a:p>
-            <a:r>
-              <a:rPr lang="en-BR" sz="2000" dirty="0"/>
-              <a:t>Overall, this project showed me how a knowledge graph can turn separate datasets into connected information and make comparisons between programmes and courses easier to understand.</a:t>
+              <a:t>For me, the most useful part of the assignment was seeing how separate CSV files could become one connected graph that I could explore with queries.</a:t>
             </a:r>
           </a:p>
         </p:txBody>
@@ -13336,24 +13320,10 @@
           </a:p>
           <a:p>
             <a:r>
-              <a:rPr lang="en-US" sz="2400" dirty="0"/>
-              <a:t>The goal was not only to import CSV files, but to make the relationships visible and </a:t>
-            </a:r>
-            <a:r>
-              <a:rPr lang="en-US" sz="2400" dirty="0" err="1"/>
-              <a:t>queryable</a:t>
-            </a:r>
-            <a:r>
-              <a:rPr lang="en-US" sz="2400" dirty="0"/>
-              <a:t>.</a:t>
-            </a:r>
-          </a:p>
-          <a:p>
-            <a:endParaRPr lang="en-US" dirty="0">
-              <a:solidFill>
-                <a:schemeClr val="tx1"/>
-              </a:solidFill>
-            </a:endParaRPr>
+              <a:rPr lang="en-BR" sz="2400" dirty="0"/>
+              <a:t>My goal was to understand how the CSV files were connected and then build a graph that I could explore with Cypher queries.</a:t>
+            </a:r>
+            <a:endParaRPr lang="en-US" sz="2400" dirty="0"/>
           </a:p>
           <a:p>
             <a:endParaRPr lang="en-BR" dirty="0"/>
@@ -13724,14 +13694,13 @@
             </a:r>
             <a:r>
               <a:rPr lang="en-US" sz="2000" dirty="0"/>
-              <a:t> have courses, courses have topics and courses also have learning outcomes. Neo4j lets us follow those links directly instead of trying to piece them together manually from separate tables.</a:t>
-            </a:r>
-          </a:p>
-          <a:p>
-            <a:pPr marL="0" indent="0">
-              <a:buNone/>
-            </a:pPr>
-            <a:endParaRPr lang="en-US" dirty="0"/>
+              <a:t> have courses, courses have topics and courses also have learning outcomes. </a:t>
+            </a:r>
+            <a:r>
+              <a:rPr lang="en-BR" sz="2000" dirty="0"/>
+              <a:t>Using Neo4j made it easier for me to see how programmes, courses, topics and learning outcomes are connected.</a:t>
+            </a:r>
+            <a:endParaRPr lang="en-US" sz="2000" dirty="0"/>
           </a:p>
           <a:p>
             <a:endParaRPr lang="en-US" dirty="0"/>
@@ -14929,7 +14898,7 @@
         </p:nvSpPr>
         <p:spPr>
           <a:xfrm>
-            <a:off x="7160555" y="2130057"/>
+            <a:off x="6965481" y="2145076"/>
             <a:ext cx="3017520" cy="310896"/>
           </a:xfrm>
           <a:prstGeom prst="rect">
@@ -15223,7 +15192,7 @@
         </p:nvSpPr>
         <p:spPr>
           <a:xfrm>
-            <a:off x="6965481" y="4498484"/>
+            <a:off x="6965481" y="4105699"/>
             <a:ext cx="4693118" cy="777240"/>
           </a:xfrm>
           <a:prstGeom prst="rect">
@@ -15247,7 +15216,7 @@
                   <a:schemeClr val="tx2"/>
                 </a:solidFill>
               </a:rPr>
-              <a:t>This screenshot is useful for the final submission because it proves that the schema was designed manually before importing.</a:t>
+              <a:t>This screenshot proves that the schema was designed manually before importing.</a:t>
             </a:r>
           </a:p>
         </p:txBody>
@@ -15457,17 +15426,27 @@
           </a:bodyPr>
           <a:lstStyle/>
           <a:p>
-            <a:pPr marL="0" indent="0">
-              <a:buNone/>
-            </a:pPr>
             <a:r>
               <a:rPr lang="en-US" sz="2000" dirty="0">
                 <a:solidFill>
                   <a:schemeClr val="tx2"/>
                 </a:solidFill>
               </a:rPr>
-              <a:t>The import result confirms that the CSV files were processed and nodes were created in Neo4j. This was the point where the dataset became a real graph database.</a:t>
-            </a:r>
+              <a:t>The import result confirms that the CSV files were processed and nodes were created in Neo4j. </a:t>
+            </a:r>
+            <a:r>
+              <a:rPr lang="en-BR" sz="2000" dirty="0">
+                <a:solidFill>
+                  <a:schemeClr val="tx2"/>
+                </a:solidFill>
+              </a:rPr>
+              <a:t>After the import was completed, I could finally see the dataset as a connected graph.</a:t>
+            </a:r>
+            <a:endParaRPr lang="en-US" sz="2000" dirty="0">
+              <a:solidFill>
+                <a:schemeClr val="tx2"/>
+              </a:solidFill>
+            </a:endParaRPr>
           </a:p>
         </p:txBody>
       </p:sp>
@@ -16877,26 +16856,22 @@
         <p:spPr>
           <a:xfrm>
             <a:off x="533398" y="1748474"/>
-            <a:ext cx="6828297" cy="4728524"/>
-          </a:xfrm>
-        </p:spPr>
-        <p:txBody>
-          <a:bodyPr/>
+            <a:ext cx="7696202" cy="4728524"/>
+          </a:xfrm>
+        </p:spPr>
+        <p:txBody>
+          <a:bodyPr>
+            <a:normAutofit/>
+          </a:bodyPr>
           <a:lstStyle/>
           <a:p>
             <a:pPr marL="0" indent="0">
               <a:buNone/>
             </a:pPr>
             <a:r>
-              <a:rPr lang="en-US" sz="1600" dirty="0"/>
-              <a:t>This helped me see which courses have the most detailed topic structure.</a:t>
-            </a:r>
-          </a:p>
-          <a:p>
-            <a:pPr marL="0" indent="0">
-              <a:buNone/>
-            </a:pPr>
-            <a:endParaRPr lang="en-BR" dirty="0"/>
+              <a:rPr lang="en-BR" sz="1600" dirty="0"/>
+              <a:t>This helped me see which courses have more learning outcomes attached to them.</a:t>
+            </a:r>
           </a:p>
         </p:txBody>
       </p:sp>
@@ -17282,17 +17257,19 @@
           </a:bodyPr>
           <a:lstStyle/>
           <a:p>
-            <a:pPr marL="0" indent="0">
-              <a:buNone/>
-            </a:pPr>
-            <a:r>
-              <a:rPr lang="en-US" sz="2000" dirty="0">
+            <a:r>
+              <a:rPr lang="en-BR" sz="2000" dirty="0">
                 <a:solidFill>
                   <a:schemeClr val="tx2"/>
                 </a:solidFill>
               </a:rPr>
-              <a:t>My interpretation: these courses are either broader or broken into more detailed topic units.</a:t>
-            </a:r>
+              <a:t>For me, this suggests that these courses cover more topics or divide the content into smaller parts.</a:t>
+            </a:r>
+            <a:endParaRPr lang="en-US" sz="2000" dirty="0">
+              <a:solidFill>
+                <a:schemeClr val="tx2"/>
+              </a:solidFill>
+            </a:endParaRPr>
           </a:p>
         </p:txBody>
       </p:sp>
